--- a/答辩PPT/ppt.pptx
+++ b/答辩PPT/ppt.pptx
@@ -1203,7 +1203,7 @@
           <a:p>
             <a:fld id="{5BCAD085-E8A6-8845-BD4E-CB4CCA059FC4}" type="datetimeFigureOut">
               <a:rPr lang="en-US" smtClean="0"/>
-              <a:t>6/4/2026</a:t>
+              <a:t>6/5/2026</a:t>
             </a:fld>
             <a:endParaRPr lang="en-US"/>
           </a:p>
@@ -1371,7 +1371,7 @@
           <a:p>
             <a:fld id="{5BCAD085-E8A6-8845-BD4E-CB4CCA059FC4}" type="datetimeFigureOut">
               <a:rPr lang="en-US" smtClean="0"/>
-              <a:t>6/4/2026</a:t>
+              <a:t>6/5/2026</a:t>
             </a:fld>
             <a:endParaRPr lang="en-US"/>
           </a:p>
@@ -1549,7 +1549,7 @@
           <a:p>
             <a:fld id="{5BCAD085-E8A6-8845-BD4E-CB4CCA059FC4}" type="datetimeFigureOut">
               <a:rPr lang="en-US" smtClean="0"/>
-              <a:t>6/4/2026</a:t>
+              <a:t>6/5/2026</a:t>
             </a:fld>
             <a:endParaRPr lang="en-US"/>
           </a:p>
@@ -1717,7 +1717,7 @@
           <a:p>
             <a:fld id="{5BCAD085-E8A6-8845-BD4E-CB4CCA059FC4}" type="datetimeFigureOut">
               <a:rPr lang="en-US" smtClean="0"/>
-              <a:t>6/4/2026</a:t>
+              <a:t>6/5/2026</a:t>
             </a:fld>
             <a:endParaRPr lang="en-US"/>
           </a:p>
@@ -1962,7 +1962,7 @@
           <a:p>
             <a:fld id="{5BCAD085-E8A6-8845-BD4E-CB4CCA059FC4}" type="datetimeFigureOut">
               <a:rPr lang="en-US" smtClean="0"/>
-              <a:t>6/4/2026</a:t>
+              <a:t>6/5/2026</a:t>
             </a:fld>
             <a:endParaRPr lang="en-US"/>
           </a:p>
@@ -2247,7 +2247,7 @@
           <a:p>
             <a:fld id="{5BCAD085-E8A6-8845-BD4E-CB4CCA059FC4}" type="datetimeFigureOut">
               <a:rPr lang="en-US" smtClean="0"/>
-              <a:t>6/4/2026</a:t>
+              <a:t>6/5/2026</a:t>
             </a:fld>
             <a:endParaRPr lang="en-US"/>
           </a:p>
@@ -2666,7 +2666,7 @@
           <a:p>
             <a:fld id="{5BCAD085-E8A6-8845-BD4E-CB4CCA059FC4}" type="datetimeFigureOut">
               <a:rPr lang="en-US" smtClean="0"/>
-              <a:t>6/4/2026</a:t>
+              <a:t>6/5/2026</a:t>
             </a:fld>
             <a:endParaRPr lang="en-US"/>
           </a:p>
@@ -2783,7 +2783,7 @@
           <a:p>
             <a:fld id="{5BCAD085-E8A6-8845-BD4E-CB4CCA059FC4}" type="datetimeFigureOut">
               <a:rPr lang="en-US" smtClean="0"/>
-              <a:t>6/4/2026</a:t>
+              <a:t>6/5/2026</a:t>
             </a:fld>
             <a:endParaRPr lang="en-US"/>
           </a:p>
@@ -2878,7 +2878,7 @@
           <a:p>
             <a:fld id="{5BCAD085-E8A6-8845-BD4E-CB4CCA059FC4}" type="datetimeFigureOut">
               <a:rPr lang="en-US" smtClean="0"/>
-              <a:t>6/4/2026</a:t>
+              <a:t>6/5/2026</a:t>
             </a:fld>
             <a:endParaRPr lang="en-US"/>
           </a:p>
@@ -3153,7 +3153,7 @@
           <a:p>
             <a:fld id="{5BCAD085-E8A6-8845-BD4E-CB4CCA059FC4}" type="datetimeFigureOut">
               <a:rPr lang="en-US" smtClean="0"/>
-              <a:t>6/4/2026</a:t>
+              <a:t>6/5/2026</a:t>
             </a:fld>
             <a:endParaRPr lang="en-US"/>
           </a:p>
@@ -3405,7 +3405,7 @@
           <a:p>
             <a:fld id="{5BCAD085-E8A6-8845-BD4E-CB4CCA059FC4}" type="datetimeFigureOut">
               <a:rPr lang="en-US" smtClean="0"/>
-              <a:t>6/4/2026</a:t>
+              <a:t>6/5/2026</a:t>
             </a:fld>
             <a:endParaRPr lang="en-US"/>
           </a:p>
@@ -3616,7 +3616,7 @@
           <a:p>
             <a:fld id="{5BCAD085-E8A6-8845-BD4E-CB4CCA059FC4}" type="datetimeFigureOut">
               <a:rPr lang="en-US" smtClean="0"/>
-              <a:t>6/4/2026</a:t>
+              <a:t>6/5/2026</a:t>
             </a:fld>
             <a:endParaRPr lang="en-US"/>
           </a:p>
